--- a/TPM_1_Reinicio_Rapido.pptx
+++ b/TPM_1_Reinicio_Rapido.pptx
@@ -113,6 +113,59 @@
     </p:ext>
   </p:extLst>
 </p:presentation>
+</file>
+
+<file path=ppt/changesInfos/changesInfo1.xml><?xml version="1.0" encoding="utf-8"?>
+<pc:chgInfo xmlns:a="http://schemas.openxmlformats.org/drawingml/2006/main" xmlns:r="http://schemas.openxmlformats.org/officeDocument/2006/relationships" xmlns:ac="http://schemas.microsoft.com/office/drawing/2013/main/command" xmlns:pc="http://schemas.microsoft.com/office/powerpoint/2013/main/command">
+  <pc:docChgLst>
+    <pc:chgData name="Saul Rodriguez Garduno" userId="89bbfc5b-c516-44bd-896b-a6523f35c36f" providerId="ADAL" clId="{82688A9A-497A-47A0-B559-B845EB09B0DD}"/>
+    <pc:docChg chg="modSld">
+      <pc:chgData name="Saul Rodriguez Garduno" userId="89bbfc5b-c516-44bd-896b-a6523f35c36f" providerId="ADAL" clId="{82688A9A-497A-47A0-B559-B845EB09B0DD}" dt="2026-09-19T05:30:06.789" v="37" actId="1076"/>
+      <pc:docMkLst>
+        <pc:docMk/>
+      </pc:docMkLst>
+      <pc:sldChg chg="addSp modSp mod">
+        <pc:chgData name="Saul Rodriguez Garduno" userId="89bbfc5b-c516-44bd-896b-a6523f35c36f" providerId="ADAL" clId="{82688A9A-497A-47A0-B559-B845EB09B0DD}" dt="2026-09-19T05:30:06.789" v="37" actId="1076"/>
+        <pc:sldMkLst>
+          <pc:docMk/>
+          <pc:sldMk cId="4055971772" sldId="436"/>
+        </pc:sldMkLst>
+        <pc:spChg chg="mod">
+          <ac:chgData name="Saul Rodriguez Garduno" userId="89bbfc5b-c516-44bd-896b-a6523f35c36f" providerId="ADAL" clId="{82688A9A-497A-47A0-B559-B845EB09B0DD}" dt="2026-09-19T05:21:32.552" v="13" actId="20577"/>
+          <ac:spMkLst>
+            <pc:docMk/>
+            <pc:sldMk cId="4055971772" sldId="436"/>
+            <ac:spMk id="73" creationId="{00000000-0000-0000-0000-000000000000}"/>
+          </ac:spMkLst>
+        </pc:spChg>
+        <pc:picChg chg="add mod">
+          <ac:chgData name="Saul Rodriguez Garduno" userId="89bbfc5b-c516-44bd-896b-a6523f35c36f" providerId="ADAL" clId="{82688A9A-497A-47A0-B559-B845EB09B0DD}" dt="2026-09-19T05:22:18.662" v="20" actId="14100"/>
+          <ac:picMkLst>
+            <pc:docMk/>
+            <pc:sldMk cId="4055971772" sldId="436"/>
+            <ac:picMk id="6" creationId="{368BEC24-02BB-F17D-07F7-58F7DDA4A776}"/>
+          </ac:picMkLst>
+        </pc:picChg>
+        <pc:picChg chg="add mod">
+          <ac:chgData name="Saul Rodriguez Garduno" userId="89bbfc5b-c516-44bd-896b-a6523f35c36f" providerId="ADAL" clId="{82688A9A-497A-47A0-B559-B845EB09B0DD}" dt="2026-09-19T05:30:03.246" v="36" actId="1076"/>
+          <ac:picMkLst>
+            <pc:docMk/>
+            <pc:sldMk cId="4055971772" sldId="436"/>
+            <ac:picMk id="9" creationId="{BD23FF10-A72E-9CD0-4149-328995BBD438}"/>
+          </ac:picMkLst>
+        </pc:picChg>
+        <pc:picChg chg="add mod">
+          <ac:chgData name="Saul Rodriguez Garduno" userId="89bbfc5b-c516-44bd-896b-a6523f35c36f" providerId="ADAL" clId="{82688A9A-497A-47A0-B559-B845EB09B0DD}" dt="2026-09-19T05:30:06.789" v="37" actId="1076"/>
+          <ac:picMkLst>
+            <pc:docMk/>
+            <pc:sldMk cId="4055971772" sldId="436"/>
+            <ac:picMk id="11" creationId="{9EBFD14A-33DC-6B15-3E7C-16E6F02C9405}"/>
+          </ac:picMkLst>
+        </pc:picChg>
+      </pc:sldChg>
+    </pc:docChg>
+  </pc:docChgLst>
+</pc:chgInfo>
 </file>
 
 <file path=ppt/notesMasters/notesMaster1.xml><?xml version="1.0" encoding="utf-8"?>
@@ -2304,7 +2357,7 @@
               <a:defRPr/>
             </a:pPr>
             <a:r>
-              <a:rPr lang="en-US" altLang="ko-KR" sz="1800" b="1" spc="-30" dirty="0" smtClean="0">
+              <a:rPr lang="en-US" altLang="ko-KR" sz="1800" b="1" spc="-30" dirty="0">
                 <a:solidFill>
                   <a:prstClr val="black"/>
                 </a:solidFill>
@@ -2381,14 +2434,14 @@
               <a:defRPr/>
             </a:pPr>
             <a:r>
-              <a:rPr lang="en-US" altLang="ko-KR" sz="1600" dirty="0" smtClean="0">
+              <a:rPr lang="en-US" altLang="ko-KR" sz="1600" dirty="0">
                 <a:solidFill>
                   <a:schemeClr val="tx1"/>
                 </a:solidFill>
                 <a:latin typeface="LG스마트체 Regular" panose="020B0600000101010101" pitchFamily="50" charset="-127"/>
                 <a:ea typeface="LG스마트체 Regular" panose="020B0600000101010101" pitchFamily="50" charset="-127"/>
               </a:rPr>
-              <a:t>Install PCB, Fastening 1/3/4, AVI, Top Unloader and Top Cover</a:t>
+              <a:t>Install PCB, Fastening , Top Unloader and Top Cover</a:t>
             </a:r>
             <a:endParaRPr kumimoji="0" lang="en-US" altLang="ko-KR" sz="1600" b="1" i="0" strike="noStrike" kern="1200" cap="none" spc="0" normalizeH="0" baseline="0" noProof="0" dirty="0">
               <a:ln>
@@ -2808,7 +2861,7 @@
               <a:defRPr/>
             </a:pPr>
             <a:r>
-              <a:rPr kumimoji="1" lang="es-419" altLang="ko-KR" sz="1300" b="1" i="0" u="none" strike="noStrike" kern="1200" cap="none" spc="-50" normalizeH="0" baseline="0" noProof="0" dirty="0" smtClean="0">
+              <a:rPr kumimoji="1" lang="es-419" altLang="ko-KR" sz="1300" b="1" i="0" u="none" strike="noStrike" kern="1200" cap="none" spc="-50" normalizeH="0" baseline="0" noProof="0" dirty="0">
                 <a:ln>
                   <a:noFill/>
                 </a:ln>
@@ -3157,10 +3210,9 @@
               <a:t> </a:t>
             </a:r>
             <a:r>
-              <a:rPr lang="es-419" altLang="ko-KR" sz="1400" b="1" dirty="0" smtClean="0"/>
+              <a:rPr lang="es-419" altLang="ko-KR" sz="1400" b="1" dirty="0"/>
               <a:t>EFFECT:</a:t>
             </a:r>
-            <a:endParaRPr lang="es-419" altLang="ko-KR" sz="1400" b="1" dirty="0"/>
           </a:p>
           <a:p>
             <a:pPr marL="171450" indent="-171450">
@@ -4053,7 +4105,7 @@
         </p:nvGraphicFramePr>
         <p:xfrm>
           <a:off x="8807451" y="560208"/>
-          <a:ext cx="1012827" cy="950688"/>
+          <a:ext cx="1012827" cy="874488"/>
         </p:xfrm>
         <a:graphic>
           <a:graphicData uri="http://schemas.openxmlformats.org/drawingml/2006/table">
@@ -7467,7 +7519,7 @@
               <a:t> </a:t>
             </a:r>
             <a:r>
-              <a:rPr kumimoji="1" lang="es-419" altLang="ko-KR" sz="1300" b="1" i="0" u="none" strike="noStrike" kern="1200" cap="none" spc="0" normalizeH="0" baseline="0" noProof="0" dirty="0" smtClean="0">
+              <a:rPr kumimoji="1" lang="es-419" altLang="ko-KR" sz="1300" b="1" i="0" u="none" strike="noStrike" kern="1200" cap="none" spc="0" normalizeH="0" baseline="0" noProof="0" dirty="0">
                 <a:ln>
                   <a:noFill/>
                 </a:ln>
@@ -7947,30 +7999,6 @@
               </a:rPr>
               <a:t>Bottom Station has a restart feature, but it relies on a RestartProcess() method that the AcuraLibrary.dll of these stations does not declare.</a:t>
             </a:r>
-            <a:r>
-              <a:rPr lang="en-US" altLang="ko-KR" sz="1100" dirty="0" err="1">
-                <a:solidFill>
-                  <a:prstClr val="black"/>
-                </a:solidFill>
-                <a:latin typeface="LG스마트체 Regular" panose="020B0600000101010101" pitchFamily="50" charset="-127"/>
-                <a:ea typeface="LG스마트체 Regular" panose="020B0600000101010101" pitchFamily="50" charset="-127"/>
-                <a:cs typeface="Arial" panose="020B0604020202020204" pitchFamily="34" charset="0"/>
-                <a:sym typeface="Wingdings" pitchFamily="2" charset="2"/>
-              </a:rPr>
-              <a:t/>
-            </a:r>
-            <a:r>
-              <a:rPr lang="en-US" altLang="ko-KR" sz="1100" dirty="0">
-                <a:solidFill>
-                  <a:prstClr val="black"/>
-                </a:solidFill>
-                <a:latin typeface="LG스마트체 Regular" panose="020B0600000101010101" pitchFamily="50" charset="-127"/>
-                <a:ea typeface="LG스마트체 Regular" panose="020B0600000101010101" pitchFamily="50" charset="-127"/>
-                <a:cs typeface="Arial" panose="020B0604020202020204" pitchFamily="34" charset="0"/>
-                <a:sym typeface="Wingdings" pitchFamily="2" charset="2"/>
-              </a:rPr>
-              <a:t/>
-            </a:r>
           </a:p>
         </p:txBody>
       </p:sp>
@@ -8028,14 +8056,14 @@
               <a:t>18</a:t>
             </a:r>
             <a:r>
-              <a:rPr lang="en-US" altLang="ko-KR" sz="1000" b="1" spc="-29" dirty="0" smtClean="0">
+              <a:rPr lang="en-US" altLang="ko-KR" sz="1000" b="1" spc="-29" dirty="0">
                 <a:latin typeface="Arial Narrow" panose="020B0606020202030204" pitchFamily="34" charset="0"/>
                 <a:ea typeface="LG스마트체 Regular" panose="020B0600000101010101" pitchFamily="50" charset="-127"/>
               </a:rPr>
               <a:t>/09/2026</a:t>
             </a:r>
             <a:r>
-              <a:rPr lang="ko-KR" altLang="en-US" sz="1000" b="1" spc="-29" dirty="0" smtClean="0">
+              <a:rPr lang="ko-KR" altLang="en-US" sz="1000" b="1" spc="-29" dirty="0">
                 <a:latin typeface="Arial Narrow" panose="020B0606020202030204" pitchFamily="34" charset="0"/>
                 <a:ea typeface="LG스마트체 Regular" panose="020B0600000101010101" pitchFamily="50" charset="-127"/>
               </a:rPr>
@@ -8270,10 +8298,10 @@
           </a:lstStyle>
           <a:p>
             <a:r>
-              <a:rPr lang="es-MX" altLang="ko-KR" sz="1400" b="1" dirty="0" smtClean="0"/>
+              <a:rPr lang="es-MX" altLang="ko-KR" sz="1400" b="1" dirty="0"/>
               <a:t>IMPACT:</a:t>
             </a:r>
-            <a:endParaRPr lang="es-419" altLang="ko-KR" sz="1400" b="1" dirty="0" smtClean="0"/>
+            <a:endParaRPr lang="es-419" altLang="ko-KR" sz="1400" b="1" dirty="0"/>
           </a:p>
           <a:p>
             <a:pPr marL="171450" indent="-171450">
@@ -8290,10 +8318,6 @@
             <a:r>
               <a:rPr lang="en-US" altLang="ko-KR" dirty="0"/>
               <a:t>Restart time reduced from 2.5-3 min to 10-15 s on each of the 7 stations.</a:t>
-            </a:r>
-            <a:r>
-              <a:rPr lang="en-US" altLang="ko-KR" dirty="0" smtClean="0"/>
-              <a:t/>
             </a:r>
           </a:p>
           <a:p>
@@ -8314,23 +8338,7 @@
             </a:r>
             <a:r>
               <a:rPr lang="es-MX" altLang="ko-KR" dirty="0"/>
-              <a:t> </a:t>
-            </a:r>
-            <a:r>
-              <a:rPr lang="es-MX" altLang="ko-KR" dirty="0" err="1"/>
-              <a:t/>
-            </a:r>
-            <a:r>
-              <a:rPr lang="es-MX" altLang="ko-KR" dirty="0"/>
-              <a:t> </a:t>
-            </a:r>
-            <a:r>
-              <a:rPr lang="es-MX" altLang="ko-KR" dirty="0" err="1"/>
-              <a:t/>
-            </a:r>
-            <a:r>
-              <a:rPr lang="es-MX" altLang="ko-KR" dirty="0" smtClean="0"/>
-              <a:t/>
+              <a:t>  </a:t>
             </a:r>
           </a:p>
           <a:p>
@@ -8425,6 +8433,114 @@
           </a:p>
         </p:txBody>
       </p:sp>
+      <p:pic>
+        <p:nvPicPr>
+          <p:cNvPr id="6" name="Picture 5">
+            <a:extLst>
+              <a:ext uri="{FF2B5EF4-FFF2-40B4-BE49-F238E27FC236}">
+                <a16:creationId xmlns:a16="http://schemas.microsoft.com/office/drawing/2014/main" id="{368BEC24-02BB-F17D-07F7-58F7DDA4A776}"/>
+              </a:ext>
+            </a:extLst>
+          </p:cNvPr>
+          <p:cNvPicPr>
+            <a:picLocks noChangeAspect="1"/>
+          </p:cNvPicPr>
+          <p:nvPr/>
+        </p:nvPicPr>
+        <p:blipFill>
+          <a:blip r:embed="rId3">
+            <a:extLst>
+              <a:ext uri="{28A0092B-C50C-407E-A947-70E740481C1C}">
+                <a14:useLocalDpi xmlns:a14="http://schemas.microsoft.com/office/drawing/2010/main" val="0"/>
+              </a:ext>
+            </a:extLst>
+          </a:blip>
+          <a:stretch>
+            <a:fillRect/>
+          </a:stretch>
+        </p:blipFill>
+        <p:spPr>
+          <a:xfrm>
+            <a:off x="267419" y="3531458"/>
+            <a:ext cx="2734573" cy="833508"/>
+          </a:xfrm>
+          <a:prstGeom prst="rect">
+            <a:avLst/>
+          </a:prstGeom>
+        </p:spPr>
+      </p:pic>
+      <p:pic>
+        <p:nvPicPr>
+          <p:cNvPr id="9" name="Picture 8">
+            <a:extLst>
+              <a:ext uri="{FF2B5EF4-FFF2-40B4-BE49-F238E27FC236}">
+                <a16:creationId xmlns:a16="http://schemas.microsoft.com/office/drawing/2014/main" id="{BD23FF10-A72E-9CD0-4149-328995BBD438}"/>
+              </a:ext>
+            </a:extLst>
+          </p:cNvPr>
+          <p:cNvPicPr>
+            <a:picLocks noChangeAspect="1"/>
+          </p:cNvPicPr>
+          <p:nvPr/>
+        </p:nvPicPr>
+        <p:blipFill>
+          <a:blip r:embed="rId4">
+            <a:extLst>
+              <a:ext uri="{28A0092B-C50C-407E-A947-70E740481C1C}">
+                <a14:useLocalDpi xmlns:a14="http://schemas.microsoft.com/office/drawing/2010/main" val="0"/>
+              </a:ext>
+            </a:extLst>
+          </a:blip>
+          <a:stretch>
+            <a:fillRect/>
+          </a:stretch>
+        </p:blipFill>
+        <p:spPr>
+          <a:xfrm>
+            <a:off x="3390180" y="3634796"/>
+            <a:ext cx="1897812" cy="505884"/>
+          </a:xfrm>
+          <a:prstGeom prst="rect">
+            <a:avLst/>
+          </a:prstGeom>
+        </p:spPr>
+      </p:pic>
+      <p:pic>
+        <p:nvPicPr>
+          <p:cNvPr id="11" name="Picture 10">
+            <a:extLst>
+              <a:ext uri="{FF2B5EF4-FFF2-40B4-BE49-F238E27FC236}">
+                <a16:creationId xmlns:a16="http://schemas.microsoft.com/office/drawing/2014/main" id="{9EBFD14A-33DC-6B15-3E7C-16E6F02C9405}"/>
+              </a:ext>
+            </a:extLst>
+          </p:cNvPr>
+          <p:cNvPicPr>
+            <a:picLocks noChangeAspect="1"/>
+          </p:cNvPicPr>
+          <p:nvPr/>
+        </p:nvPicPr>
+        <p:blipFill>
+          <a:blip r:embed="rId5">
+            <a:extLst>
+              <a:ext uri="{28A0092B-C50C-407E-A947-70E740481C1C}">
+                <a14:useLocalDpi xmlns:a14="http://schemas.microsoft.com/office/drawing/2010/main" val="0"/>
+              </a:ext>
+            </a:extLst>
+          </a:blip>
+          <a:stretch>
+            <a:fillRect/>
+          </a:stretch>
+        </p:blipFill>
+        <p:spPr>
+          <a:xfrm>
+            <a:off x="3353087" y="4463716"/>
+            <a:ext cx="2029797" cy="1095383"/>
+          </a:xfrm>
+          <a:prstGeom prst="rect">
+            <a:avLst/>
+          </a:prstGeom>
+        </p:spPr>
+      </p:pic>
     </p:spTree>
     <p:extLst>
       <p:ext uri="{BB962C8B-B14F-4D97-AF65-F5344CB8AC3E}">
@@ -9016,4 +9132,10 @@
     </a:ext>
   </a:extLst>
 </a:theme>
+</file>
+
+<file path=docMetadata/LabelInfo.xml><?xml version="1.0" encoding="utf-8"?>
+<clbl:labelList xmlns:clbl="http://schemas.microsoft.com/office/2020/mipLabelMetadata">
+  <clbl:label id="{99b8a968-831d-4cfc-b1f9-4367a1331151}" enabled="1" method="Privileged" siteId="{e6c7989d-a5fe-4b7b-a335-3288406db2fd}" removed="0"/>
+</clbl:labelList>
 </file>